--- a/public/fun/pack/pptx/birthdaypro/돌잔치프리미엄_17_돌잡이중심_코발트아이보리.pptx
+++ b/public/fun/pack/pptx/birthdaypro/돌잔치프리미엄_17_돌잡이중심_코발트아이보리.pptx
@@ -112,12 +112,12 @@
   <p:extLst>
     <p:ext uri="{521415D9-36F7-43E2-AB2F-B90AF26B5E84}">
       <p14:sectionLst xmlns:p14="http://schemas.microsoft.com/office/powerpoint/2010/main">
-        <p14:section name="시작" id="{A57A2866-43D2-4A79-9B38-83DB436D2808}">
+        <p14:section name="시작" id="{AFD8E6C3-B776-42D9-9005-AC80A8C21B6F}">
           <p14:sldIdLst>
             <p14:sldId id="256"/>
           </p14:sldIdLst>
         </p14:section>
-        <p14:section name="본문" id="{74469EBA-AA83-4209-9F16-A0FF1D32798F}">
+        <p14:section name="본문" id="{5098E216-2AEC-438E-9F4A-BFB888711B1E}">
           <p14:sldIdLst>
             <p14:sldId id="257"/>
             <p14:sldId id="258"/>
@@ -125,7 +125,7 @@
             <p14:sldId id="260"/>
           </p14:sldIdLst>
         </p14:section>
-        <p14:section name="마무리" id="{21E3BD11-C50C-45CC-B8D8-A6DF4715375E}">
+        <p14:section name="마무리" id="{06B6DBD6-76A9-4EE4-8392-7C15DF4E47D9}">
           <p14:sldIdLst>
             <p14:sldId id="261"/>
           </p14:sldIdLst>
@@ -1525,7 +1525,7 @@
             </a:lvl1pPr>
           </a:lstStyle>
           <a:p>
-            <a:fld id="{08FBCA49-F717-431B-A387-CE8CDE94E9D6}" type="slidenum">
+            <a:fld id="{A52F79BA-A870-4F04-914E-D7CBBAFCC2F9}" type="slidenum">
               <a:rPr lang="en-US"/>
               <a:t>‹#›</a:t>
             </a:fld>
@@ -2346,7 +2346,7 @@
             </a:lvl1pPr>
           </a:lstStyle>
           <a:p>
-            <a:fld id="{713AEB38-55CD-4C81-A43F-A49D46F72280}" type="slidenum">
+            <a:fld id="{B8F992DC-3AB7-4C1F-B106-CE37E5E8CF56}" type="slidenum">
               <a:rPr lang="en-US"/>
               <a:t>‹#›</a:t>
             </a:fld>
@@ -3087,7 +3087,7 @@
             </a:lvl1pPr>
           </a:lstStyle>
           <a:p>
-            <a:fld id="{69EDD616-D914-46DC-B12B-B6EB4E72B170}" type="slidenum">
+            <a:fld id="{CBA39F62-F667-44B4-A227-6298388F76CA}" type="slidenum">
               <a:rPr lang="en-US"/>
               <a:t>‹#›</a:t>
             </a:fld>
@@ -3972,7 +3972,7 @@
           <a:p>
             <a:r>
               <a:rPr lang="ko-KR"/>
-              <a:t>아기 이름 · 0000. 00. 00</a:t>
+              <a:t>아기 이름 · 날짜 입력</a:t>
             </a:r>
           </a:p>
           <a:p>
@@ -4157,7 +4157,7 @@
           <a:bodyPr/>
           <a:lstStyle/>
           <a:p>
-            <a:fld id="{2AA628B6-CE6D-4604-86C0-D31D8EEE9A83}" type="slidenum">
+            <a:fld id="{3E0328BC-02A9-4C87-9AFF-F71E30B8A43A}" type="slidenum">
               <a:rPr lang="en-US"/>
               <a:t>‹#›</a:t>
             </a:fld>
@@ -4779,7 +4779,7 @@
           <a:bodyPr/>
           <a:lstStyle/>
           <a:p>
-            <a:fld id="{37C80EF1-6238-498D-88A2-E8E8DB260DD9}" type="slidenum">
+            <a:fld id="{9829F44D-F937-4393-AD9F-A49F2776DE12}" type="slidenum">
               <a:rPr lang="en-US"/>
               <a:t>‹#›</a:t>
             </a:fld>
@@ -5965,7 +5965,7 @@
           <a:bodyPr/>
           <a:lstStyle/>
           <a:p>
-            <a:fld id="{39F1F2A6-A72F-4C47-92C3-A0537CE88236}" type="slidenum">
+            <a:fld id="{BE68283F-377C-479A-8229-8C05A7B66EE5}" type="slidenum">
               <a:rPr lang="en-US"/>
               <a:t>‹#›</a:t>
             </a:fld>
@@ -6744,7 +6744,7 @@
           <a:bodyPr/>
           <a:lstStyle/>
           <a:p>
-            <a:fld id="{F96067F1-4DEA-4734-9A76-92D44C59A655}" type="slidenum">
+            <a:fld id="{140F9A91-5061-49F0-9D86-607A2CEAE0ED}" type="slidenum">
               <a:rPr lang="en-US"/>
               <a:t>‹#›</a:t>
             </a:fld>
